--- a/assets/memos/A6-memo.pptx
+++ b/assets/memos/A6-memo.pptx
@@ -3105,8 +3105,8 @@
         </p:nvSpPr>
         <p:spPr>
           <a:xfrm>
-            <a:off x="648000" y="1180800"/>
-            <a:ext cx="5058000" cy="511200"/>
+            <a:off x="532800" y="1180800"/>
+            <a:ext cx="6490800" cy="511200"/>
           </a:xfrm>
           <a:prstGeom prst="rect">
             <a:avLst/>
@@ -3128,7 +3128,7 @@
               </a:spcAft>
             </a:pPr>
             <a:r>
-              <a:rPr sz="2000" b="1" i="0">
+              <a:rPr sz="1800" b="1" i="0">
                 <a:solidFill>
                   <a:srgbClr val="4388BC"/>
                 </a:solidFill>
@@ -4562,8 +4562,8 @@
         </p:nvSpPr>
         <p:spPr>
           <a:xfrm>
-            <a:off x="648000" y="1180800"/>
-            <a:ext cx="5058000" cy="511200"/>
+            <a:off x="532800" y="1180800"/>
+            <a:ext cx="6490800" cy="511200"/>
           </a:xfrm>
           <a:prstGeom prst="rect">
             <a:avLst/>
@@ -4585,7 +4585,7 @@
               </a:spcAft>
             </a:pPr>
             <a:r>
-              <a:rPr sz="2000" b="1" i="0">
+              <a:rPr sz="1800" b="1" i="0">
                 <a:solidFill>
                   <a:srgbClr val="4388BC"/>
                 </a:solidFill>

--- a/assets/memos/A6-memo.pptx
+++ b/assets/memos/A6-memo.pptx
@@ -3402,7 +3402,7 @@
                 </a:solidFill>
                 <a:latin typeface="Arial"/>
               </a:rPr>
-              <a:t>→ Chaque jour, des millions de tentatives d'escroquerie circulent s…</a:t>
+              <a:t>→ Chaque jour, des millions de tentatives d'escroquerie circulent sur internet. Pas besoin d'être une cible de choix pour être touché — les attaques sont souvent automatisées et touchent tout le monde indifféremment.</a:t>
             </a:r>
           </a:p>
           <a:p>
@@ -3421,7 +3421,7 @@
                 </a:solidFill>
                 <a:latin typeface="Arial"/>
               </a:rPr>
-              <a:t>→ Faux e-mails ou SMS imitant votre banque, La Poste, ou les impôts…</a:t>
+              <a:t>→ Faux e-mails ou SMS imitant votre banque, La Poste, ou les impôts pour voler vos identifiants.</a:t>
             </a:r>
           </a:p>
           <a:p>
@@ -3459,7 +3459,7 @@
                 </a:solidFill>
                 <a:latin typeface="Arial"/>
               </a:rPr>
-              <a:t>→ Des bases de données entières sont revendues sur le dark web aprè…</a:t>
+              <a:t>→ Des bases de données entières sont revendues sur le dark web après chaque fuite de données.</a:t>
             </a:r>
           </a:p>
         </p:txBody>
@@ -4014,7 +4014,7 @@
                 </a:solidFill>
                 <a:latin typeface="Arial"/>
               </a:rPr>
-              <a:t>→ Un mot de passe faible, c'est comme laisser la clé sous le pailla…</a:t>
+              <a:t>→ Un mot de passe faible, c'est comme laisser la clé sous le paillasson. Pourtant, "123456" reste le mot de passe le plus utilisé en France. Voici comment construire une protection réelle.</a:t>
             </a:r>
           </a:p>
           <a:p>
@@ -4052,7 +4052,7 @@
                 </a:solidFill>
                 <a:latin typeface="Arial"/>
               </a:rPr>
-              <a:t>→ Combinez majuscules, minuscules, chiffres et symboles. Un mot de …</a:t>
+              <a:t>→ Combinez majuscules, minuscules, chiffres et symboles. Un mot de passe de 12 caractères aléatoires prendrait des milliers d'années à craquer par force brute.</a:t>
             </a:r>
           </a:p>
           <a:p>
@@ -4320,7 +4320,7 @@
                 </a:solidFill>
                 <a:latin typeface="Arial"/>
               </a:rPr>
-              <a:t>→ Open source, gratuit, audité publiquement. Le choix des Commons p…</a:t>
+              <a:t>→ Open source, gratuit, audité publiquement. Le choix des Commons par excellence. Disponible sur tous vos appareils.</a:t>
             </a:r>
           </a:p>
           <a:p>
@@ -4339,7 +4339,7 @@
                 </a:solidFill>
                 <a:latin typeface="Arial"/>
               </a:rPr>
-              <a:t>→ Stockage local uniquement, idéal pour ceux qui ne veulent pas con…</a:t>
+              <a:t>→ Stockage local uniquement, idéal pour ceux qui ne veulent pas confier leurs données au cloud. Très robuste.</a:t>
             </a:r>
           </a:p>
           <a:p>
@@ -4358,7 +4358,7 @@
                 </a:solidFill>
                 <a:latin typeface="Arial"/>
               </a:rPr>
-              <a:t>→ Interface très intuitive, idéale pour les familles. Solution paya…</a:t>
+              <a:t>→ Interface très intuitive, idéale pour les familles. Solution payante mais complète, avec partage sécurisé.</a:t>
             </a:r>
           </a:p>
           <a:p>
@@ -4377,7 +4377,7 @@
                 </a:solidFill>
                 <a:latin typeface="Arial"/>
               </a:rPr>
-              <a:t>→ Utiliser un gestionnaire de mots de passe est l'une des mesures l…</a:t>
+              <a:t>→ Utiliser un gestionnaire de mots de passe est l'une des mesures les plus efficaces que vous puissiez prendre. Une seule "clé maître" à retenir, des dizaines de portes verrouillées.</a:t>
             </a:r>
           </a:p>
         </p:txBody>
@@ -4859,7 +4859,7 @@
                 </a:solidFill>
                 <a:latin typeface="Arial"/>
               </a:rPr>
-              <a:t>→ Même avec un mot de passe fort, un compte peut être compromis si …</a:t>
+              <a:t>→ Même avec un mot de passe fort, un compte peut être compromis si ce mot de passe est volé. Le 2FA ajoute un second verrou : même si quelqu'un connaît votre mot de passe, il ne peut pas entrer sans le second code.</a:t>
             </a:r>
           </a:p>
           <a:p>
@@ -5184,7 +5184,7 @@
                 </a:solidFill>
                 <a:latin typeface="Arial"/>
               </a:rPr>
-              <a:t>→ Les mises à jour ne servent pas qu'à ajouter des fonctionnalités …</a:t>
+              <a:t>→ Les mises à jour ne servent pas qu'à ajouter des fonctionnalités — elles corrigent des failles de sécurité que les pirates exploitent activement. Reporter une mise à jour, c'est laisser une fenêtre ouverte.</a:t>
             </a:r>
           </a:p>
           <a:p>
@@ -5203,7 +5203,7 @@
                 </a:solidFill>
                 <a:latin typeface="Arial"/>
               </a:rPr>
-              <a:t>→ Système d'exploitation : Windows, macOS, Linux — mettez à jour ré…</a:t>
+              <a:t>→ Système d'exploitation : Windows, macOS, Linux — mettez à jour régulièrement</a:t>
             </a:r>
           </a:p>
           <a:p>
@@ -5471,7 +5471,7 @@
                 </a:solidFill>
                 <a:latin typeface="Arial"/>
               </a:rPr>
-              <a:t>→ Ransomware, panne matérielle, vol d'ordinateur, inondation — les …</a:t>
+              <a:t>→ Ransomware, panne matérielle, vol d'ordinateur, inondation — les risques de perdre vos données sont réels et variés. La règle du 3-2-1 est le standard recommandé par les experts en sécurité.</a:t>
             </a:r>
           </a:p>
           <a:p>
@@ -5509,7 +5509,7 @@
                 </a:solidFill>
                 <a:latin typeface="Arial"/>
               </a:rPr>
-              <a:t>→ Conservez toujours trois copies de vos données importantes. L'ori…</a:t>
+              <a:t>→ Conservez toujours trois copies de vos données importantes. L'original ne suffit pas.</a:t>
             </a:r>
           </a:p>
           <a:p>
@@ -5715,7 +5715,7 @@
                 </a:solidFill>
                 <a:latin typeface="Arial"/>
               </a:rPr>
-              <a:t>→ La sécurité numérique et la sobriété vont de pair. Moins d'applic…</a:t>
+              <a:t>→ La sécurité numérique et la sobriété vont de pair. Moins d'applications installées, moins de comptes ouverts — c'est aussi moins de surface d'attaque et moins de données exposées.</a:t>
             </a:r>
           </a:p>
           <a:p>
@@ -5753,7 +5753,7 @@
                 </a:solidFill>
                 <a:latin typeface="Arial"/>
               </a:rPr>
-              <a:t>→ Chaque app inutilisée est un potentiel vecteur d'attaque. Supprim…</a:t>
+              <a:t>→ Chaque app inutilisée est un potentiel vecteur d'attaque. Supprimez ce que vous n'utilisez plus.</a:t>
             </a:r>
           </a:p>
         </p:txBody>

--- a/assets/memos/A6-memo.pptx
+++ b/assets/memos/A6-memo.pptx
@@ -3167,7 +3167,7 @@
         <p:spPr>
           <a:xfrm>
             <a:off x="532800" y="1749600"/>
-            <a:ext cx="6490800" cy="1371600"/>
+            <a:ext cx="6490800" cy="1835999"/>
           </a:xfrm>
           <a:prstGeom prst="rect">
             <a:avLst/>
@@ -3208,7 +3208,7 @@
         <p:spPr>
           <a:xfrm>
             <a:off x="532800" y="1749600"/>
-            <a:ext cx="572400" cy="1371600"/>
+            <a:ext cx="572400" cy="1835999"/>
           </a:xfrm>
           <a:prstGeom prst="rect">
             <a:avLst/>
@@ -3374,7 +3374,7 @@
         <p:spPr>
           <a:xfrm>
             <a:off x="1159200" y="2214000"/>
-            <a:ext cx="5828400" cy="885600"/>
+            <a:ext cx="5828400" cy="1335599"/>
           </a:xfrm>
           <a:prstGeom prst="rect">
             <a:avLst/>
@@ -3472,7 +3472,7 @@
         </p:nvSpPr>
         <p:spPr>
           <a:xfrm>
-            <a:off x="532800" y="3186000"/>
+            <a:off x="532800" y="3650400"/>
             <a:ext cx="6490800" cy="1371600"/>
           </a:xfrm>
           <a:prstGeom prst="rect">
@@ -3513,7 +3513,7 @@
         </p:nvSpPr>
         <p:spPr>
           <a:xfrm>
-            <a:off x="532800" y="3186000"/>
+            <a:off x="532800" y="3650400"/>
             <a:ext cx="572400" cy="1371600"/>
           </a:xfrm>
           <a:prstGeom prst="rect">
@@ -3554,7 +3554,7 @@
         </p:nvSpPr>
         <p:spPr>
           <a:xfrm>
-            <a:off x="1206000" y="3607200"/>
+            <a:off x="1206000" y="4071600"/>
             <a:ext cx="5752800" cy="7200"/>
           </a:xfrm>
           <a:prstGeom prst="rect">
@@ -3595,7 +3595,7 @@
         </p:nvSpPr>
         <p:spPr>
           <a:xfrm>
-            <a:off x="532800" y="3252600"/>
+            <a:off x="532800" y="3717000"/>
             <a:ext cx="572400" cy="288000"/>
           </a:xfrm>
           <a:prstGeom prst="rect">
@@ -3637,7 +3637,7 @@
         </p:nvSpPr>
         <p:spPr>
           <a:xfrm>
-            <a:off x="1177200" y="3221999"/>
+            <a:off x="1177200" y="3686400"/>
             <a:ext cx="5810400" cy="370799"/>
           </a:xfrm>
           <a:prstGeom prst="rect">
@@ -3679,8 +3679,8 @@
         </p:nvSpPr>
         <p:spPr>
           <a:xfrm>
-            <a:off x="1159200" y="3650399"/>
-            <a:ext cx="5828400" cy="885600"/>
+            <a:off x="1159200" y="4114800"/>
+            <a:ext cx="5828400" cy="871200"/>
           </a:xfrm>
           <a:prstGeom prst="rect">
             <a:avLst/>
@@ -3778,8 +3778,8 @@
         </p:nvSpPr>
         <p:spPr>
           <a:xfrm>
-            <a:off x="532800" y="4622400"/>
-            <a:ext cx="6490800" cy="1371600"/>
+            <a:off x="532800" y="5086800"/>
+            <a:ext cx="6490800" cy="1835999"/>
           </a:xfrm>
           <a:prstGeom prst="rect">
             <a:avLst/>
@@ -3819,8 +3819,8 @@
         </p:nvSpPr>
         <p:spPr>
           <a:xfrm>
-            <a:off x="532800" y="4622400"/>
-            <a:ext cx="572400" cy="1371600"/>
+            <a:off x="532800" y="5086800"/>
+            <a:ext cx="572400" cy="1835999"/>
           </a:xfrm>
           <a:prstGeom prst="rect">
             <a:avLst/>
@@ -3860,7 +3860,7 @@
         </p:nvSpPr>
         <p:spPr>
           <a:xfrm>
-            <a:off x="1206000" y="5043600"/>
+            <a:off x="1206000" y="5508000"/>
             <a:ext cx="5752800" cy="7200"/>
           </a:xfrm>
           <a:prstGeom prst="rect">
@@ -3901,7 +3901,7 @@
         </p:nvSpPr>
         <p:spPr>
           <a:xfrm>
-            <a:off x="532800" y="4689000"/>
+            <a:off x="532800" y="5153400"/>
             <a:ext cx="572400" cy="288000"/>
           </a:xfrm>
           <a:prstGeom prst="rect">
@@ -3943,7 +3943,7 @@
         </p:nvSpPr>
         <p:spPr>
           <a:xfrm>
-            <a:off x="1177200" y="4658400"/>
+            <a:off x="1177200" y="5122800"/>
             <a:ext cx="5810400" cy="370799"/>
           </a:xfrm>
           <a:prstGeom prst="rect">
@@ -3985,8 +3985,8 @@
         </p:nvSpPr>
         <p:spPr>
           <a:xfrm>
-            <a:off x="1159200" y="5086800"/>
-            <a:ext cx="5828400" cy="885600"/>
+            <a:off x="1159200" y="5551200"/>
+            <a:ext cx="5828400" cy="1335599"/>
           </a:xfrm>
           <a:prstGeom prst="rect">
             <a:avLst/>
@@ -4079,312 +4079,6 @@
       <p:sp>
         <p:nvSpPr>
           <p:cNvPr id="21" name="Rectangle 20"/>
-          <p:cNvSpPr/>
-          <p:nvPr/>
-        </p:nvSpPr>
-        <p:spPr>
-          <a:xfrm>
-            <a:off x="532800" y="6058799"/>
-            <a:ext cx="6490800" cy="1371600"/>
-          </a:xfrm>
-          <a:prstGeom prst="rect">
-            <a:avLst/>
-          </a:prstGeom>
-          <a:solidFill>
-            <a:srgbClr val="EBF7F6"/>
-          </a:solidFill>
-          <a:ln>
-            <a:noFill/>
-          </a:ln>
-        </p:spPr>
-        <p:style>
-          <a:lnRef idx="1">
-            <a:schemeClr val="accent1"/>
-          </a:lnRef>
-          <a:fillRef idx="3">
-            <a:schemeClr val="accent1"/>
-          </a:fillRef>
-          <a:effectRef idx="2">
-            <a:schemeClr val="accent1"/>
-          </a:effectRef>
-          <a:fontRef idx="minor">
-            <a:schemeClr val="lt1"/>
-          </a:fontRef>
-        </p:style>
-        <p:txBody>
-          <a:bodyPr rtlCol="0" anchor="ctr"/>
-          <a:lstStyle/>
-          <a:p/>
-        </p:txBody>
-      </p:sp>
-      <p:sp>
-        <p:nvSpPr>
-          <p:cNvPr id="22" name="Rectangle 21"/>
-          <p:cNvSpPr/>
-          <p:nvPr/>
-        </p:nvSpPr>
-        <p:spPr>
-          <a:xfrm>
-            <a:off x="532800" y="6058799"/>
-            <a:ext cx="572400" cy="1371600"/>
-          </a:xfrm>
-          <a:prstGeom prst="rect">
-            <a:avLst/>
-          </a:prstGeom>
-          <a:solidFill>
-            <a:srgbClr val="187C88"/>
-          </a:solidFill>
-          <a:ln>
-            <a:noFill/>
-          </a:ln>
-        </p:spPr>
-        <p:style>
-          <a:lnRef idx="1">
-            <a:schemeClr val="accent1"/>
-          </a:lnRef>
-          <a:fillRef idx="3">
-            <a:schemeClr val="accent1"/>
-          </a:fillRef>
-          <a:effectRef idx="2">
-            <a:schemeClr val="accent1"/>
-          </a:effectRef>
-          <a:fontRef idx="minor">
-            <a:schemeClr val="lt1"/>
-          </a:fontRef>
-        </p:style>
-        <p:txBody>
-          <a:bodyPr rtlCol="0" anchor="ctr"/>
-          <a:lstStyle/>
-          <a:p/>
-        </p:txBody>
-      </p:sp>
-      <p:sp>
-        <p:nvSpPr>
-          <p:cNvPr id="23" name="Rectangle 22"/>
-          <p:cNvSpPr/>
-          <p:nvPr/>
-        </p:nvSpPr>
-        <p:spPr>
-          <a:xfrm>
-            <a:off x="1206000" y="6480000"/>
-            <a:ext cx="5752800" cy="7200"/>
-          </a:xfrm>
-          <a:prstGeom prst="rect">
-            <a:avLst/>
-          </a:prstGeom>
-          <a:solidFill>
-            <a:srgbClr val="DDDDDD"/>
-          </a:solidFill>
-          <a:ln>
-            <a:noFill/>
-          </a:ln>
-        </p:spPr>
-        <p:style>
-          <a:lnRef idx="1">
-            <a:schemeClr val="accent1"/>
-          </a:lnRef>
-          <a:fillRef idx="3">
-            <a:schemeClr val="accent1"/>
-          </a:fillRef>
-          <a:effectRef idx="2">
-            <a:schemeClr val="accent1"/>
-          </a:effectRef>
-          <a:fontRef idx="minor">
-            <a:schemeClr val="lt1"/>
-          </a:fontRef>
-        </p:style>
-        <p:txBody>
-          <a:bodyPr rtlCol="0" anchor="ctr"/>
-          <a:lstStyle/>
-          <a:p/>
-        </p:txBody>
-      </p:sp>
-      <p:sp>
-        <p:nvSpPr>
-          <p:cNvPr id="24" name="TextBox 23"/>
-          <p:cNvSpPr txBox="1"/>
-          <p:nvPr/>
-        </p:nvSpPr>
-        <p:spPr>
-          <a:xfrm>
-            <a:off x="532800" y="6125399"/>
-            <a:ext cx="572400" cy="288000"/>
-          </a:xfrm>
-          <a:prstGeom prst="rect">
-            <a:avLst/>
-          </a:prstGeom>
-          <a:noFill/>
-        </p:spPr>
-        <p:txBody>
-          <a:bodyPr wrap="square" tIns="0" bIns="0" lIns="18000" rIns="18000">
-            <a:spAutoFit/>
-          </a:bodyPr>
-          <a:lstStyle/>
-          <a:p>
-            <a:pPr algn="ctr">
-              <a:spcBef>
-                <a:spcPts val="0"/>
-              </a:spcBef>
-              <a:spcAft>
-                <a:spcPts val="100"/>
-              </a:spcAft>
-            </a:pPr>
-            <a:r>
-              <a:rPr sz="2200" b="1" i="0">
-                <a:solidFill>
-                  <a:srgbClr val="FFFFFF"/>
-                </a:solidFill>
-                <a:latin typeface="Arial"/>
-              </a:rPr>
-              <a:t>4</a:t>
-            </a:r>
-          </a:p>
-        </p:txBody>
-      </p:sp>
-      <p:sp>
-        <p:nvSpPr>
-          <p:cNvPr id="25" name="TextBox 24"/>
-          <p:cNvSpPr txBox="1"/>
-          <p:nvPr/>
-        </p:nvSpPr>
-        <p:spPr>
-          <a:xfrm>
-            <a:off x="1177200" y="6094800"/>
-            <a:ext cx="5810400" cy="370799"/>
-          </a:xfrm>
-          <a:prstGeom prst="rect">
-            <a:avLst/>
-          </a:prstGeom>
-          <a:noFill/>
-        </p:spPr>
-        <p:txBody>
-          <a:bodyPr wrap="square" tIns="0" bIns="0" lIns="18000" rIns="18000">
-            <a:spAutoFit/>
-          </a:bodyPr>
-          <a:lstStyle/>
-          <a:p>
-            <a:pPr algn="l">
-              <a:spcBef>
-                <a:spcPts val="0"/>
-              </a:spcBef>
-              <a:spcAft>
-                <a:spcPts val="100"/>
-              </a:spcAft>
-            </a:pPr>
-            <a:r>
-              <a:rPr sz="1100" b="1" i="0">
-                <a:solidFill>
-                  <a:srgbClr val="187C88"/>
-                </a:solidFill>
-                <a:latin typeface="Arial"/>
-              </a:rPr>
-              <a:t>Les gestionnaires de mots de passe</a:t>
-            </a:r>
-          </a:p>
-        </p:txBody>
-      </p:sp>
-      <p:sp>
-        <p:nvSpPr>
-          <p:cNvPr id="26" name="TextBox 25"/>
-          <p:cNvSpPr txBox="1"/>
-          <p:nvPr/>
-        </p:nvSpPr>
-        <p:spPr>
-          <a:xfrm>
-            <a:off x="1159200" y="6523200"/>
-            <a:ext cx="5828400" cy="885600"/>
-          </a:xfrm>
-          <a:prstGeom prst="rect">
-            <a:avLst/>
-          </a:prstGeom>
-          <a:noFill/>
-        </p:spPr>
-        <p:txBody>
-          <a:bodyPr wrap="square" tIns="0" bIns="0" lIns="18000" rIns="18000">
-            <a:spAutoFit/>
-          </a:bodyPr>
-          <a:lstStyle/>
-          <a:p>
-            <a:pPr algn="l">
-              <a:spcBef>
-                <a:spcPts val="0"/>
-              </a:spcBef>
-              <a:spcAft>
-                <a:spcPts val="100"/>
-              </a:spcAft>
-            </a:pPr>
-            <a:r>
-              <a:rPr sz="1000" b="0" i="0">
-                <a:solidFill>
-                  <a:srgbClr val="2B2B2B"/>
-                </a:solidFill>
-                <a:latin typeface="Arial"/>
-              </a:rPr>
-              <a:t>→ Open source, gratuit, audité publiquement. Le choix des Commons par excellence. Disponible sur tous vos appareils.</a:t>
-            </a:r>
-          </a:p>
-          <a:p>
-            <a:pPr algn="l">
-              <a:spcBef>
-                <a:spcPts val="0"/>
-              </a:spcBef>
-              <a:spcAft>
-                <a:spcPts val="100"/>
-              </a:spcAft>
-            </a:pPr>
-            <a:r>
-              <a:rPr sz="1000" b="0" i="0">
-                <a:solidFill>
-                  <a:srgbClr val="2B2B2B"/>
-                </a:solidFill>
-                <a:latin typeface="Arial"/>
-              </a:rPr>
-              <a:t>→ Stockage local uniquement, idéal pour ceux qui ne veulent pas confier leurs données au cloud. Très robuste.</a:t>
-            </a:r>
-          </a:p>
-          <a:p>
-            <a:pPr algn="l">
-              <a:spcBef>
-                <a:spcPts val="0"/>
-              </a:spcBef>
-              <a:spcAft>
-                <a:spcPts val="100"/>
-              </a:spcAft>
-            </a:pPr>
-            <a:r>
-              <a:rPr sz="1000" b="0" i="0">
-                <a:solidFill>
-                  <a:srgbClr val="2B2B2B"/>
-                </a:solidFill>
-                <a:latin typeface="Arial"/>
-              </a:rPr>
-              <a:t>→ Interface très intuitive, idéale pour les familles. Solution payante mais complète, avec partage sécurisé.</a:t>
-            </a:r>
-          </a:p>
-          <a:p>
-            <a:pPr algn="l">
-              <a:spcBef>
-                <a:spcPts val="0"/>
-              </a:spcBef>
-              <a:spcAft>
-                <a:spcPts val="100"/>
-              </a:spcAft>
-            </a:pPr>
-            <a:r>
-              <a:rPr sz="1000" b="0" i="0">
-                <a:solidFill>
-                  <a:srgbClr val="2B2B2B"/>
-                </a:solidFill>
-                <a:latin typeface="Arial"/>
-              </a:rPr>
-              <a:t>→ Utiliser un gestionnaire de mots de passe est l'une des mesures les plus efficaces que vous puissiez prendre. Une seule "clé maître" à retenir, des dizaines de portes verrouillées.</a:t>
-            </a:r>
-          </a:p>
-        </p:txBody>
-      </p:sp>
-      <p:sp>
-        <p:nvSpPr>
-          <p:cNvPr id="27" name="Rectangle 26"/>
           <p:cNvSpPr/>
           <p:nvPr/>
         </p:nvSpPr>
@@ -4427,7 +4121,7 @@
       </p:sp>
       <p:sp>
         <p:nvSpPr>
-          <p:cNvPr id="28" name="TextBox 27"/>
+          <p:cNvPr id="22" name="TextBox 21"/>
           <p:cNvSpPr txBox="1"/>
           <p:nvPr/>
         </p:nvSpPr>
@@ -4462,7 +4156,7 @@
                 </a:solidFill>
                 <a:latin typeface="Arial"/>
               </a:rPr>
-              <a:t>→ Suite en page 2 : L'authentification à deux facteurs (2FA) | Protéger ses appareils | Sauvegarder ses données : la règle du 3-2-1</a:t>
+              <a:t>→ Suite en page 2 : Les gestionnaires de mots de passe | L'authentification à deux facteurs (2FA) | Protéger ses appareils</a:t>
             </a:r>
           </a:p>
           <a:p>
@@ -4488,7 +4182,7 @@
       </p:sp>
       <p:sp>
         <p:nvSpPr>
-          <p:cNvPr id="29" name="TextBox 28"/>
+          <p:cNvPr id="23" name="TextBox 22"/>
           <p:cNvSpPr txBox="1"/>
           <p:nvPr/>
         </p:nvSpPr>
@@ -4624,7 +4318,313 @@
         <p:spPr>
           <a:xfrm>
             <a:off x="532800" y="1749600"/>
-            <a:ext cx="6490800" cy="1371600"/>
+            <a:ext cx="6490800" cy="1987199"/>
+          </a:xfrm>
+          <a:prstGeom prst="rect">
+            <a:avLst/>
+          </a:prstGeom>
+          <a:solidFill>
+            <a:srgbClr val="EBF7F6"/>
+          </a:solidFill>
+          <a:ln>
+            <a:noFill/>
+          </a:ln>
+        </p:spPr>
+        <p:style>
+          <a:lnRef idx="1">
+            <a:schemeClr val="accent1"/>
+          </a:lnRef>
+          <a:fillRef idx="3">
+            <a:schemeClr val="accent1"/>
+          </a:fillRef>
+          <a:effectRef idx="2">
+            <a:schemeClr val="accent1"/>
+          </a:effectRef>
+          <a:fontRef idx="minor">
+            <a:schemeClr val="lt1"/>
+          </a:fontRef>
+        </p:style>
+        <p:txBody>
+          <a:bodyPr rtlCol="0" anchor="ctr"/>
+          <a:lstStyle/>
+          <a:p/>
+        </p:txBody>
+      </p:sp>
+      <p:sp>
+        <p:nvSpPr>
+          <p:cNvPr id="4" name="Rectangle 3"/>
+          <p:cNvSpPr/>
+          <p:nvPr/>
+        </p:nvSpPr>
+        <p:spPr>
+          <a:xfrm>
+            <a:off x="532800" y="1749600"/>
+            <a:ext cx="572400" cy="1987199"/>
+          </a:xfrm>
+          <a:prstGeom prst="rect">
+            <a:avLst/>
+          </a:prstGeom>
+          <a:solidFill>
+            <a:srgbClr val="187C88"/>
+          </a:solidFill>
+          <a:ln>
+            <a:noFill/>
+          </a:ln>
+        </p:spPr>
+        <p:style>
+          <a:lnRef idx="1">
+            <a:schemeClr val="accent1"/>
+          </a:lnRef>
+          <a:fillRef idx="3">
+            <a:schemeClr val="accent1"/>
+          </a:fillRef>
+          <a:effectRef idx="2">
+            <a:schemeClr val="accent1"/>
+          </a:effectRef>
+          <a:fontRef idx="minor">
+            <a:schemeClr val="lt1"/>
+          </a:fontRef>
+        </p:style>
+        <p:txBody>
+          <a:bodyPr rtlCol="0" anchor="ctr"/>
+          <a:lstStyle/>
+          <a:p/>
+        </p:txBody>
+      </p:sp>
+      <p:sp>
+        <p:nvSpPr>
+          <p:cNvPr id="5" name="Rectangle 4"/>
+          <p:cNvSpPr/>
+          <p:nvPr/>
+        </p:nvSpPr>
+        <p:spPr>
+          <a:xfrm>
+            <a:off x="1206000" y="2170800"/>
+            <a:ext cx="5752800" cy="7200"/>
+          </a:xfrm>
+          <a:prstGeom prst="rect">
+            <a:avLst/>
+          </a:prstGeom>
+          <a:solidFill>
+            <a:srgbClr val="DDDDDD"/>
+          </a:solidFill>
+          <a:ln>
+            <a:noFill/>
+          </a:ln>
+        </p:spPr>
+        <p:style>
+          <a:lnRef idx="1">
+            <a:schemeClr val="accent1"/>
+          </a:lnRef>
+          <a:fillRef idx="3">
+            <a:schemeClr val="accent1"/>
+          </a:fillRef>
+          <a:effectRef idx="2">
+            <a:schemeClr val="accent1"/>
+          </a:effectRef>
+          <a:fontRef idx="minor">
+            <a:schemeClr val="lt1"/>
+          </a:fontRef>
+        </p:style>
+        <p:txBody>
+          <a:bodyPr rtlCol="0" anchor="ctr"/>
+          <a:lstStyle/>
+          <a:p/>
+        </p:txBody>
+      </p:sp>
+      <p:sp>
+        <p:nvSpPr>
+          <p:cNvPr id="6" name="TextBox 5"/>
+          <p:cNvSpPr txBox="1"/>
+          <p:nvPr/>
+        </p:nvSpPr>
+        <p:spPr>
+          <a:xfrm>
+            <a:off x="532800" y="1816200"/>
+            <a:ext cx="572400" cy="288000"/>
+          </a:xfrm>
+          <a:prstGeom prst="rect">
+            <a:avLst/>
+          </a:prstGeom>
+          <a:noFill/>
+        </p:spPr>
+        <p:txBody>
+          <a:bodyPr wrap="square" tIns="0" bIns="0" lIns="18000" rIns="18000">
+            <a:spAutoFit/>
+          </a:bodyPr>
+          <a:lstStyle/>
+          <a:p>
+            <a:pPr algn="ctr">
+              <a:spcBef>
+                <a:spcPts val="0"/>
+              </a:spcBef>
+              <a:spcAft>
+                <a:spcPts val="100"/>
+              </a:spcAft>
+            </a:pPr>
+            <a:r>
+              <a:rPr sz="2200" b="1" i="0">
+                <a:solidFill>
+                  <a:srgbClr val="FFFFFF"/>
+                </a:solidFill>
+                <a:latin typeface="Arial"/>
+              </a:rPr>
+              <a:t>4</a:t>
+            </a:r>
+          </a:p>
+        </p:txBody>
+      </p:sp>
+      <p:sp>
+        <p:nvSpPr>
+          <p:cNvPr id="7" name="TextBox 6"/>
+          <p:cNvSpPr txBox="1"/>
+          <p:nvPr/>
+        </p:nvSpPr>
+        <p:spPr>
+          <a:xfrm>
+            <a:off x="1177200" y="1785600"/>
+            <a:ext cx="5810400" cy="370799"/>
+          </a:xfrm>
+          <a:prstGeom prst="rect">
+            <a:avLst/>
+          </a:prstGeom>
+          <a:noFill/>
+        </p:spPr>
+        <p:txBody>
+          <a:bodyPr wrap="square" tIns="0" bIns="0" lIns="18000" rIns="18000">
+            <a:spAutoFit/>
+          </a:bodyPr>
+          <a:lstStyle/>
+          <a:p>
+            <a:pPr algn="l">
+              <a:spcBef>
+                <a:spcPts val="0"/>
+              </a:spcBef>
+              <a:spcAft>
+                <a:spcPts val="100"/>
+              </a:spcAft>
+            </a:pPr>
+            <a:r>
+              <a:rPr sz="1100" b="1" i="0">
+                <a:solidFill>
+                  <a:srgbClr val="187C88"/>
+                </a:solidFill>
+                <a:latin typeface="Arial"/>
+              </a:rPr>
+              <a:t>Les gestionnaires de mots de passe</a:t>
+            </a:r>
+          </a:p>
+        </p:txBody>
+      </p:sp>
+      <p:sp>
+        <p:nvSpPr>
+          <p:cNvPr id="8" name="TextBox 7"/>
+          <p:cNvSpPr txBox="1"/>
+          <p:nvPr/>
+        </p:nvSpPr>
+        <p:spPr>
+          <a:xfrm>
+            <a:off x="1159200" y="2214000"/>
+            <a:ext cx="5828400" cy="1486800"/>
+          </a:xfrm>
+          <a:prstGeom prst="rect">
+            <a:avLst/>
+          </a:prstGeom>
+          <a:noFill/>
+        </p:spPr>
+        <p:txBody>
+          <a:bodyPr wrap="square" tIns="0" bIns="0" lIns="18000" rIns="18000">
+            <a:spAutoFit/>
+          </a:bodyPr>
+          <a:lstStyle/>
+          <a:p>
+            <a:pPr algn="l">
+              <a:spcBef>
+                <a:spcPts val="0"/>
+              </a:spcBef>
+              <a:spcAft>
+                <a:spcPts val="100"/>
+              </a:spcAft>
+            </a:pPr>
+            <a:r>
+              <a:rPr sz="1000" b="0" i="0">
+                <a:solidFill>
+                  <a:srgbClr val="2B2B2B"/>
+                </a:solidFill>
+                <a:latin typeface="Arial"/>
+              </a:rPr>
+              <a:t>→ Open source, gratuit, audité publiquement. Le choix des Commons par excellence. Disponible sur tous vos appareils.</a:t>
+            </a:r>
+          </a:p>
+          <a:p>
+            <a:pPr algn="l">
+              <a:spcBef>
+                <a:spcPts val="0"/>
+              </a:spcBef>
+              <a:spcAft>
+                <a:spcPts val="100"/>
+              </a:spcAft>
+            </a:pPr>
+            <a:r>
+              <a:rPr sz="1000" b="0" i="0">
+                <a:solidFill>
+                  <a:srgbClr val="2B2B2B"/>
+                </a:solidFill>
+                <a:latin typeface="Arial"/>
+              </a:rPr>
+              <a:t>→ Stockage local uniquement, idéal pour ceux qui ne veulent pas confier leurs données au cloud. Très robuste.</a:t>
+            </a:r>
+          </a:p>
+          <a:p>
+            <a:pPr algn="l">
+              <a:spcBef>
+                <a:spcPts val="0"/>
+              </a:spcBef>
+              <a:spcAft>
+                <a:spcPts val="100"/>
+              </a:spcAft>
+            </a:pPr>
+            <a:r>
+              <a:rPr sz="1000" b="0" i="0">
+                <a:solidFill>
+                  <a:srgbClr val="2B2B2B"/>
+                </a:solidFill>
+                <a:latin typeface="Arial"/>
+              </a:rPr>
+              <a:t>→ Interface très intuitive, idéale pour les familles. Solution payante mais complète, avec partage sécurisé.</a:t>
+            </a:r>
+          </a:p>
+          <a:p>
+            <a:pPr algn="l">
+              <a:spcBef>
+                <a:spcPts val="0"/>
+              </a:spcBef>
+              <a:spcAft>
+                <a:spcPts val="100"/>
+              </a:spcAft>
+            </a:pPr>
+            <a:r>
+              <a:rPr sz="1000" b="0" i="0">
+                <a:solidFill>
+                  <a:srgbClr val="2B2B2B"/>
+                </a:solidFill>
+                <a:latin typeface="Arial"/>
+              </a:rPr>
+              <a:t>→ Utiliser un gestionnaire de mots de passe est l'une des mesures les plus efficaces que vous puissiez prendre. Une seule "clé maître" à retenir, des dizaines de portes verrouillées.</a:t>
+            </a:r>
+          </a:p>
+        </p:txBody>
+      </p:sp>
+      <p:sp>
+        <p:nvSpPr>
+          <p:cNvPr id="9" name="Rectangle 8"/>
+          <p:cNvSpPr/>
+          <p:nvPr/>
+        </p:nvSpPr>
+        <p:spPr>
+          <a:xfrm>
+            <a:off x="532800" y="3801599"/>
+            <a:ext cx="6490800" cy="1533600"/>
           </a:xfrm>
           <a:prstGeom prst="rect">
             <a:avLst/>
@@ -4658,14 +4658,14 @@
       </p:sp>
       <p:sp>
         <p:nvSpPr>
-          <p:cNvPr id="4" name="Rectangle 3"/>
+          <p:cNvPr id="10" name="Rectangle 9"/>
           <p:cNvSpPr/>
           <p:nvPr/>
         </p:nvSpPr>
         <p:spPr>
           <a:xfrm>
-            <a:off x="532800" y="1749600"/>
-            <a:ext cx="572400" cy="1371600"/>
+            <a:off x="532800" y="3801599"/>
+            <a:ext cx="572400" cy="1533600"/>
           </a:xfrm>
           <a:prstGeom prst="rect">
             <a:avLst/>
@@ -4699,13 +4699,13 @@
       </p:sp>
       <p:sp>
         <p:nvSpPr>
-          <p:cNvPr id="5" name="Rectangle 4"/>
+          <p:cNvPr id="11" name="Rectangle 10"/>
           <p:cNvSpPr/>
           <p:nvPr/>
         </p:nvSpPr>
         <p:spPr>
           <a:xfrm>
-            <a:off x="1206000" y="2170800"/>
+            <a:off x="1206000" y="4222799"/>
             <a:ext cx="5752800" cy="7200"/>
           </a:xfrm>
           <a:prstGeom prst="rect">
@@ -4740,13 +4740,13 @@
       </p:sp>
       <p:sp>
         <p:nvSpPr>
-          <p:cNvPr id="6" name="TextBox 5"/>
+          <p:cNvPr id="12" name="TextBox 11"/>
           <p:cNvSpPr txBox="1"/>
           <p:nvPr/>
         </p:nvSpPr>
         <p:spPr>
           <a:xfrm>
-            <a:off x="532800" y="1816200"/>
+            <a:off x="532800" y="3868199"/>
             <a:ext cx="572400" cy="288000"/>
           </a:xfrm>
           <a:prstGeom prst="rect">
@@ -4782,13 +4782,13 @@
       </p:sp>
       <p:sp>
         <p:nvSpPr>
-          <p:cNvPr id="7" name="TextBox 6"/>
+          <p:cNvPr id="13" name="TextBox 12"/>
           <p:cNvSpPr txBox="1"/>
           <p:nvPr/>
         </p:nvSpPr>
         <p:spPr>
           <a:xfrm>
-            <a:off x="1177200" y="1785600"/>
+            <a:off x="1177200" y="3837599"/>
             <a:ext cx="5810400" cy="370799"/>
           </a:xfrm>
           <a:prstGeom prst="rect">
@@ -4824,14 +4824,14 @@
       </p:sp>
       <p:sp>
         <p:nvSpPr>
-          <p:cNvPr id="8" name="TextBox 7"/>
+          <p:cNvPr id="14" name="TextBox 13"/>
           <p:cNvSpPr txBox="1"/>
           <p:nvPr/>
         </p:nvSpPr>
         <p:spPr>
           <a:xfrm>
-            <a:off x="1159200" y="2214000"/>
-            <a:ext cx="5828400" cy="885600"/>
+            <a:off x="1159200" y="4265999"/>
+            <a:ext cx="5828400" cy="1033199"/>
           </a:xfrm>
           <a:prstGeom prst="rect">
             <a:avLst/>
@@ -4923,14 +4923,14 @@
       </p:sp>
       <p:sp>
         <p:nvSpPr>
-          <p:cNvPr id="9" name="Rectangle 8"/>
+          <p:cNvPr id="15" name="Rectangle 14"/>
           <p:cNvSpPr/>
           <p:nvPr/>
         </p:nvSpPr>
         <p:spPr>
           <a:xfrm>
-            <a:off x="532800" y="3186000"/>
-            <a:ext cx="6490800" cy="1371600"/>
+            <a:off x="532800" y="5399999"/>
+            <a:ext cx="6490800" cy="1533600"/>
           </a:xfrm>
           <a:prstGeom prst="rect">
             <a:avLst/>
@@ -4964,14 +4964,14 @@
       </p:sp>
       <p:sp>
         <p:nvSpPr>
-          <p:cNvPr id="10" name="Rectangle 9"/>
+          <p:cNvPr id="16" name="Rectangle 15"/>
           <p:cNvSpPr/>
           <p:nvPr/>
         </p:nvSpPr>
         <p:spPr>
           <a:xfrm>
-            <a:off x="532800" y="3186000"/>
-            <a:ext cx="572400" cy="1371600"/>
+            <a:off x="532800" y="5399999"/>
+            <a:ext cx="572400" cy="1533600"/>
           </a:xfrm>
           <a:prstGeom prst="rect">
             <a:avLst/>
@@ -5005,13 +5005,13 @@
       </p:sp>
       <p:sp>
         <p:nvSpPr>
-          <p:cNvPr id="11" name="Rectangle 10"/>
+          <p:cNvPr id="17" name="Rectangle 16"/>
           <p:cNvSpPr/>
           <p:nvPr/>
         </p:nvSpPr>
         <p:spPr>
           <a:xfrm>
-            <a:off x="1206000" y="3607200"/>
+            <a:off x="1206000" y="5821199"/>
             <a:ext cx="5752800" cy="7200"/>
           </a:xfrm>
           <a:prstGeom prst="rect">
@@ -5046,13 +5046,13 @@
       </p:sp>
       <p:sp>
         <p:nvSpPr>
-          <p:cNvPr id="12" name="TextBox 11"/>
+          <p:cNvPr id="18" name="TextBox 17"/>
           <p:cNvSpPr txBox="1"/>
           <p:nvPr/>
         </p:nvSpPr>
         <p:spPr>
           <a:xfrm>
-            <a:off x="532800" y="3252600"/>
+            <a:off x="532800" y="5466600"/>
             <a:ext cx="572400" cy="288000"/>
           </a:xfrm>
           <a:prstGeom prst="rect">
@@ -5088,13 +5088,13 @@
       </p:sp>
       <p:sp>
         <p:nvSpPr>
-          <p:cNvPr id="13" name="TextBox 12"/>
+          <p:cNvPr id="19" name="TextBox 18"/>
           <p:cNvSpPr txBox="1"/>
           <p:nvPr/>
         </p:nvSpPr>
         <p:spPr>
           <a:xfrm>
-            <a:off x="1177200" y="3221999"/>
+            <a:off x="1177200" y="5435999"/>
             <a:ext cx="5810400" cy="370799"/>
           </a:xfrm>
           <a:prstGeom prst="rect">
@@ -5130,14 +5130,14 @@
       </p:sp>
       <p:sp>
         <p:nvSpPr>
-          <p:cNvPr id="14" name="TextBox 13"/>
+          <p:cNvPr id="20" name="TextBox 19"/>
           <p:cNvSpPr txBox="1"/>
           <p:nvPr/>
         </p:nvSpPr>
         <p:spPr>
           <a:xfrm>
-            <a:off x="1159200" y="3650399"/>
-            <a:ext cx="5828400" cy="885600"/>
+            <a:off x="1159200" y="5864400"/>
+            <a:ext cx="5828400" cy="1033199"/>
           </a:xfrm>
           <a:prstGeom prst="rect">
             <a:avLst/>
@@ -5229,14 +5229,14 @@
       </p:sp>
       <p:sp>
         <p:nvSpPr>
-          <p:cNvPr id="15" name="Rectangle 14"/>
+          <p:cNvPr id="21" name="Rectangle 20"/>
           <p:cNvSpPr/>
           <p:nvPr/>
         </p:nvSpPr>
         <p:spPr>
           <a:xfrm>
-            <a:off x="532800" y="4622400"/>
-            <a:ext cx="6490800" cy="1371600"/>
+            <a:off x="532800" y="6998399"/>
+            <a:ext cx="6490800" cy="1684800"/>
           </a:xfrm>
           <a:prstGeom prst="rect">
             <a:avLst/>
@@ -5270,14 +5270,14 @@
       </p:sp>
       <p:sp>
         <p:nvSpPr>
-          <p:cNvPr id="16" name="Rectangle 15"/>
+          <p:cNvPr id="22" name="Rectangle 21"/>
           <p:cNvSpPr/>
           <p:nvPr/>
         </p:nvSpPr>
         <p:spPr>
           <a:xfrm>
-            <a:off x="532800" y="4622400"/>
-            <a:ext cx="572400" cy="1371600"/>
+            <a:off x="532800" y="6998399"/>
+            <a:ext cx="572400" cy="1684800"/>
           </a:xfrm>
           <a:prstGeom prst="rect">
             <a:avLst/>
@@ -5311,13 +5311,13 @@
       </p:sp>
       <p:sp>
         <p:nvSpPr>
-          <p:cNvPr id="17" name="Rectangle 16"/>
+          <p:cNvPr id="23" name="Rectangle 22"/>
           <p:cNvSpPr/>
           <p:nvPr/>
         </p:nvSpPr>
         <p:spPr>
           <a:xfrm>
-            <a:off x="1206000" y="5043600"/>
+            <a:off x="1206000" y="7419600"/>
             <a:ext cx="5752800" cy="7200"/>
           </a:xfrm>
           <a:prstGeom prst="rect">
@@ -5352,13 +5352,13 @@
       </p:sp>
       <p:sp>
         <p:nvSpPr>
-          <p:cNvPr id="18" name="TextBox 17"/>
+          <p:cNvPr id="24" name="TextBox 23"/>
           <p:cNvSpPr txBox="1"/>
           <p:nvPr/>
         </p:nvSpPr>
         <p:spPr>
           <a:xfrm>
-            <a:off x="532800" y="4689000"/>
+            <a:off x="532800" y="7064999"/>
             <a:ext cx="572400" cy="288000"/>
           </a:xfrm>
           <a:prstGeom prst="rect">
@@ -5394,13 +5394,13 @@
       </p:sp>
       <p:sp>
         <p:nvSpPr>
-          <p:cNvPr id="19" name="TextBox 18"/>
+          <p:cNvPr id="25" name="TextBox 24"/>
           <p:cNvSpPr txBox="1"/>
           <p:nvPr/>
         </p:nvSpPr>
         <p:spPr>
           <a:xfrm>
-            <a:off x="1177200" y="4658400"/>
+            <a:off x="1177200" y="7034400"/>
             <a:ext cx="5810400" cy="370799"/>
           </a:xfrm>
           <a:prstGeom prst="rect">
@@ -5436,14 +5436,14 @@
       </p:sp>
       <p:sp>
         <p:nvSpPr>
-          <p:cNvPr id="20" name="TextBox 19"/>
+          <p:cNvPr id="26" name="TextBox 25"/>
           <p:cNvSpPr txBox="1"/>
           <p:nvPr/>
         </p:nvSpPr>
         <p:spPr>
           <a:xfrm>
-            <a:off x="1159200" y="5086800"/>
-            <a:ext cx="5828400" cy="885600"/>
+            <a:off x="1159200" y="7462800"/>
+            <a:ext cx="5828400" cy="1184399"/>
           </a:xfrm>
           <a:prstGeom prst="rect">
             <a:avLst/>
@@ -5535,13 +5535,13 @@
       </p:sp>
       <p:sp>
         <p:nvSpPr>
-          <p:cNvPr id="21" name="Rectangle 20"/>
+          <p:cNvPr id="27" name="Rectangle 26"/>
           <p:cNvSpPr/>
           <p:nvPr/>
         </p:nvSpPr>
         <p:spPr>
           <a:xfrm>
-            <a:off x="532800" y="6166800"/>
+            <a:off x="532800" y="8856000"/>
             <a:ext cx="6490800" cy="1263600"/>
           </a:xfrm>
           <a:prstGeom prst="rect">
@@ -5578,13 +5578,13 @@
       </p:sp>
       <p:sp>
         <p:nvSpPr>
-          <p:cNvPr id="22" name="Rectangle 21"/>
+          <p:cNvPr id="28" name="Rectangle 27"/>
           <p:cNvSpPr/>
           <p:nvPr/>
         </p:nvSpPr>
         <p:spPr>
           <a:xfrm>
-            <a:off x="698400" y="6422400"/>
+            <a:off x="698400" y="9111600"/>
             <a:ext cx="6159600" cy="7200"/>
           </a:xfrm>
           <a:prstGeom prst="rect">
@@ -5619,13 +5619,13 @@
       </p:sp>
       <p:sp>
         <p:nvSpPr>
-          <p:cNvPr id="23" name="TextBox 22"/>
+          <p:cNvPr id="29" name="TextBox 28"/>
           <p:cNvSpPr txBox="1"/>
           <p:nvPr/>
         </p:nvSpPr>
         <p:spPr>
           <a:xfrm>
-            <a:off x="676800" y="6195599"/>
+            <a:off x="676800" y="8884799"/>
             <a:ext cx="6292800" cy="234000"/>
           </a:xfrm>
           <a:prstGeom prst="rect">
@@ -5661,13 +5661,13 @@
       </p:sp>
       <p:sp>
         <p:nvSpPr>
-          <p:cNvPr id="24" name="TextBox 23"/>
+          <p:cNvPr id="30" name="TextBox 29"/>
           <p:cNvSpPr txBox="1"/>
           <p:nvPr/>
         </p:nvSpPr>
         <p:spPr>
           <a:xfrm>
-            <a:off x="676800" y="6447600"/>
+            <a:off x="676800" y="9136800"/>
             <a:ext cx="6292800" cy="946800"/>
           </a:xfrm>
           <a:prstGeom prst="rect">
@@ -5760,13 +5760,13 @@
       </p:sp>
       <p:sp>
         <p:nvSpPr>
-          <p:cNvPr id="25" name="Rectangle 24"/>
+          <p:cNvPr id="31" name="Rectangle 30"/>
           <p:cNvSpPr/>
           <p:nvPr/>
         </p:nvSpPr>
         <p:spPr>
           <a:xfrm>
-            <a:off x="532800" y="8892000"/>
+            <a:off x="532800" y="10292400"/>
             <a:ext cx="6490800" cy="1512000"/>
           </a:xfrm>
           <a:prstGeom prst="rect">
@@ -5803,13 +5803,13 @@
       </p:sp>
       <p:sp>
         <p:nvSpPr>
-          <p:cNvPr id="26" name="Rectangle 25"/>
+          <p:cNvPr id="32" name="Rectangle 31"/>
           <p:cNvSpPr/>
           <p:nvPr/>
         </p:nvSpPr>
         <p:spPr>
           <a:xfrm>
-            <a:off x="2221200" y="9478800"/>
+            <a:off x="2221200" y="10879200"/>
             <a:ext cx="3110400" cy="7200"/>
           </a:xfrm>
           <a:prstGeom prst="rect">
@@ -5844,13 +5844,13 @@
       </p:sp>
       <p:sp>
         <p:nvSpPr>
-          <p:cNvPr id="27" name="TextBox 26"/>
+          <p:cNvPr id="33" name="TextBox 32"/>
           <p:cNvSpPr txBox="1"/>
           <p:nvPr/>
         </p:nvSpPr>
         <p:spPr>
           <a:xfrm>
-            <a:off x="1792800" y="8956800"/>
+            <a:off x="1792800" y="10357200"/>
             <a:ext cx="4140000" cy="1404000"/>
           </a:xfrm>
           <a:prstGeom prst="rect">
@@ -5962,7 +5962,7 @@
       </p:sp>
       <p:sp>
         <p:nvSpPr>
-          <p:cNvPr id="28" name="TextBox 27"/>
+          <p:cNvPr id="34" name="TextBox 33"/>
           <p:cNvSpPr txBox="1"/>
           <p:nvPr/>
         </p:nvSpPr>

--- a/assets/memos/A6-memo.pptx
+++ b/assets/memos/A6-memo.pptx
@@ -3097,9 +3097,35 @@
         <p:nvPr/>
       </p:nvGrpSpPr>
       <p:grpSpPr/>
-      <p:sp>
-        <p:nvSpPr>
-          <p:cNvPr id="2" name="TextBox 1"/>
+      <p:pic>
+        <p:nvPicPr>
+          <p:cNvPr id="2" name="Picture 1" descr="bg-p1.png"/>
+          <p:cNvPicPr>
+            <a:picLocks noChangeAspect="1"/>
+          </p:cNvPicPr>
+          <p:nvPr/>
+        </p:nvPicPr>
+        <p:blipFill>
+          <a:blip r:embed="rId2">
+            <a:alphaModFix amt="80000"/>
+          </a:blip>
+          <a:stretch>
+            <a:fillRect/>
+          </a:stretch>
+        </p:blipFill>
+        <p:spPr>
+          <a:xfrm>
+            <a:off x="0" y="0"/>
+            <a:ext cx="7556399" cy="10692000"/>
+          </a:xfrm>
+          <a:prstGeom prst="rect">
+            <a:avLst/>
+          </a:prstGeom>
+        </p:spPr>
+      </p:pic>
+      <p:sp>
+        <p:nvSpPr>
+          <p:cNvPr id="3" name="TextBox 2"/>
           <p:cNvSpPr txBox="1"/>
           <p:nvPr/>
         </p:nvSpPr>
@@ -3160,7 +3186,7 @@
       </p:sp>
       <p:sp>
         <p:nvSpPr>
-          <p:cNvPr id="3" name="Rectangle 2"/>
+          <p:cNvPr id="4" name="Rectangle 3"/>
           <p:cNvSpPr/>
           <p:nvPr/>
         </p:nvSpPr>
@@ -3201,7 +3227,7 @@
       </p:sp>
       <p:sp>
         <p:nvSpPr>
-          <p:cNvPr id="4" name="Rectangle 3"/>
+          <p:cNvPr id="5" name="Rectangle 4"/>
           <p:cNvSpPr/>
           <p:nvPr/>
         </p:nvSpPr>
@@ -3242,7 +3268,7 @@
       </p:sp>
       <p:sp>
         <p:nvSpPr>
-          <p:cNvPr id="5" name="Rectangle 4"/>
+          <p:cNvPr id="6" name="Rectangle 5"/>
           <p:cNvSpPr/>
           <p:nvPr/>
         </p:nvSpPr>
@@ -3283,7 +3309,7 @@
       </p:sp>
       <p:sp>
         <p:nvSpPr>
-          <p:cNvPr id="6" name="TextBox 5"/>
+          <p:cNvPr id="7" name="TextBox 6"/>
           <p:cNvSpPr txBox="1"/>
           <p:nvPr/>
         </p:nvSpPr>
@@ -3325,7 +3351,7 @@
       </p:sp>
       <p:sp>
         <p:nvSpPr>
-          <p:cNvPr id="7" name="TextBox 6"/>
+          <p:cNvPr id="8" name="TextBox 7"/>
           <p:cNvSpPr txBox="1"/>
           <p:nvPr/>
         </p:nvSpPr>
@@ -3367,7 +3393,7 @@
       </p:sp>
       <p:sp>
         <p:nvSpPr>
-          <p:cNvPr id="8" name="TextBox 7"/>
+          <p:cNvPr id="9" name="TextBox 8"/>
           <p:cNvSpPr txBox="1"/>
           <p:nvPr/>
         </p:nvSpPr>
@@ -3466,7 +3492,7 @@
       </p:sp>
       <p:sp>
         <p:nvSpPr>
-          <p:cNvPr id="9" name="Rectangle 8"/>
+          <p:cNvPr id="10" name="Rectangle 9"/>
           <p:cNvSpPr/>
           <p:nvPr/>
         </p:nvSpPr>
@@ -3507,7 +3533,7 @@
       </p:sp>
       <p:sp>
         <p:nvSpPr>
-          <p:cNvPr id="10" name="Rectangle 9"/>
+          <p:cNvPr id="11" name="Rectangle 10"/>
           <p:cNvSpPr/>
           <p:nvPr/>
         </p:nvSpPr>
@@ -3548,7 +3574,7 @@
       </p:sp>
       <p:sp>
         <p:nvSpPr>
-          <p:cNvPr id="11" name="Rectangle 10"/>
+          <p:cNvPr id="12" name="Rectangle 11"/>
           <p:cNvSpPr/>
           <p:nvPr/>
         </p:nvSpPr>
@@ -3589,7 +3615,7 @@
       </p:sp>
       <p:sp>
         <p:nvSpPr>
-          <p:cNvPr id="12" name="TextBox 11"/>
+          <p:cNvPr id="13" name="TextBox 12"/>
           <p:cNvSpPr txBox="1"/>
           <p:nvPr/>
         </p:nvSpPr>
@@ -3631,7 +3657,7 @@
       </p:sp>
       <p:sp>
         <p:nvSpPr>
-          <p:cNvPr id="13" name="TextBox 12"/>
+          <p:cNvPr id="14" name="TextBox 13"/>
           <p:cNvSpPr txBox="1"/>
           <p:nvPr/>
         </p:nvSpPr>
@@ -3673,7 +3699,7 @@
       </p:sp>
       <p:sp>
         <p:nvSpPr>
-          <p:cNvPr id="14" name="TextBox 13"/>
+          <p:cNvPr id="15" name="TextBox 14"/>
           <p:cNvSpPr txBox="1"/>
           <p:nvPr/>
         </p:nvSpPr>
@@ -3772,7 +3798,7 @@
       </p:sp>
       <p:sp>
         <p:nvSpPr>
-          <p:cNvPr id="15" name="Rectangle 14"/>
+          <p:cNvPr id="16" name="Rectangle 15"/>
           <p:cNvSpPr/>
           <p:nvPr/>
         </p:nvSpPr>
@@ -3813,7 +3839,7 @@
       </p:sp>
       <p:sp>
         <p:nvSpPr>
-          <p:cNvPr id="16" name="Rectangle 15"/>
+          <p:cNvPr id="17" name="Rectangle 16"/>
           <p:cNvSpPr/>
           <p:nvPr/>
         </p:nvSpPr>
@@ -3854,7 +3880,7 @@
       </p:sp>
       <p:sp>
         <p:nvSpPr>
-          <p:cNvPr id="17" name="Rectangle 16"/>
+          <p:cNvPr id="18" name="Rectangle 17"/>
           <p:cNvSpPr/>
           <p:nvPr/>
         </p:nvSpPr>
@@ -3895,7 +3921,7 @@
       </p:sp>
       <p:sp>
         <p:nvSpPr>
-          <p:cNvPr id="18" name="TextBox 17"/>
+          <p:cNvPr id="19" name="TextBox 18"/>
           <p:cNvSpPr txBox="1"/>
           <p:nvPr/>
         </p:nvSpPr>
@@ -3937,7 +3963,7 @@
       </p:sp>
       <p:sp>
         <p:nvSpPr>
-          <p:cNvPr id="19" name="TextBox 18"/>
+          <p:cNvPr id="20" name="TextBox 19"/>
           <p:cNvSpPr txBox="1"/>
           <p:nvPr/>
         </p:nvSpPr>
@@ -3979,7 +4005,7 @@
       </p:sp>
       <p:sp>
         <p:nvSpPr>
-          <p:cNvPr id="20" name="TextBox 19"/>
+          <p:cNvPr id="21" name="TextBox 20"/>
           <p:cNvSpPr txBox="1"/>
           <p:nvPr/>
         </p:nvSpPr>
@@ -4078,7 +4104,7 @@
       </p:sp>
       <p:sp>
         <p:nvSpPr>
-          <p:cNvPr id="21" name="Rectangle 20"/>
+          <p:cNvPr id="22" name="Rectangle 21"/>
           <p:cNvSpPr/>
           <p:nvPr/>
         </p:nvSpPr>
@@ -4121,7 +4147,7 @@
       </p:sp>
       <p:sp>
         <p:nvSpPr>
-          <p:cNvPr id="22" name="TextBox 21"/>
+          <p:cNvPr id="23" name="TextBox 22"/>
           <p:cNvSpPr txBox="1"/>
           <p:nvPr/>
         </p:nvSpPr>
@@ -4182,7 +4208,7 @@
       </p:sp>
       <p:sp>
         <p:nvSpPr>
-          <p:cNvPr id="23" name="TextBox 22"/>
+          <p:cNvPr id="24" name="TextBox 23"/>
           <p:cNvSpPr txBox="1"/>
           <p:nvPr/>
         </p:nvSpPr>
@@ -4248,9 +4274,35 @@
         <p:nvPr/>
       </p:nvGrpSpPr>
       <p:grpSpPr/>
-      <p:sp>
-        <p:nvSpPr>
-          <p:cNvPr id="2" name="TextBox 1"/>
+      <p:pic>
+        <p:nvPicPr>
+          <p:cNvPr id="2" name="Picture 1" descr="bg-p2.png"/>
+          <p:cNvPicPr>
+            <a:picLocks noChangeAspect="1"/>
+          </p:cNvPicPr>
+          <p:nvPr/>
+        </p:nvPicPr>
+        <p:blipFill>
+          <a:blip r:embed="rId2">
+            <a:alphaModFix amt="80000"/>
+          </a:blip>
+          <a:stretch>
+            <a:fillRect/>
+          </a:stretch>
+        </p:blipFill>
+        <p:spPr>
+          <a:xfrm>
+            <a:off x="0" y="0"/>
+            <a:ext cx="7556399" cy="10692000"/>
+          </a:xfrm>
+          <a:prstGeom prst="rect">
+            <a:avLst/>
+          </a:prstGeom>
+        </p:spPr>
+      </p:pic>
+      <p:sp>
+        <p:nvSpPr>
+          <p:cNvPr id="3" name="TextBox 2"/>
           <p:cNvSpPr txBox="1"/>
           <p:nvPr/>
         </p:nvSpPr>
@@ -4311,7 +4363,7 @@
       </p:sp>
       <p:sp>
         <p:nvSpPr>
-          <p:cNvPr id="3" name="Rectangle 2"/>
+          <p:cNvPr id="4" name="Rectangle 3"/>
           <p:cNvSpPr/>
           <p:nvPr/>
         </p:nvSpPr>
@@ -4352,7 +4404,7 @@
       </p:sp>
       <p:sp>
         <p:nvSpPr>
-          <p:cNvPr id="4" name="Rectangle 3"/>
+          <p:cNvPr id="5" name="Rectangle 4"/>
           <p:cNvSpPr/>
           <p:nvPr/>
         </p:nvSpPr>
@@ -4393,7 +4445,7 @@
       </p:sp>
       <p:sp>
         <p:nvSpPr>
-          <p:cNvPr id="5" name="Rectangle 4"/>
+          <p:cNvPr id="6" name="Rectangle 5"/>
           <p:cNvSpPr/>
           <p:nvPr/>
         </p:nvSpPr>
@@ -4434,7 +4486,7 @@
       </p:sp>
       <p:sp>
         <p:nvSpPr>
-          <p:cNvPr id="6" name="TextBox 5"/>
+          <p:cNvPr id="7" name="TextBox 6"/>
           <p:cNvSpPr txBox="1"/>
           <p:nvPr/>
         </p:nvSpPr>
@@ -4476,7 +4528,7 @@
       </p:sp>
       <p:sp>
         <p:nvSpPr>
-          <p:cNvPr id="7" name="TextBox 6"/>
+          <p:cNvPr id="8" name="TextBox 7"/>
           <p:cNvSpPr txBox="1"/>
           <p:nvPr/>
         </p:nvSpPr>
@@ -4518,7 +4570,7 @@
       </p:sp>
       <p:sp>
         <p:nvSpPr>
-          <p:cNvPr id="8" name="TextBox 7"/>
+          <p:cNvPr id="9" name="TextBox 8"/>
           <p:cNvSpPr txBox="1"/>
           <p:nvPr/>
         </p:nvSpPr>
@@ -4617,7 +4669,7 @@
       </p:sp>
       <p:sp>
         <p:nvSpPr>
-          <p:cNvPr id="9" name="Rectangle 8"/>
+          <p:cNvPr id="10" name="Rectangle 9"/>
           <p:cNvSpPr/>
           <p:nvPr/>
         </p:nvSpPr>
@@ -4658,7 +4710,7 @@
       </p:sp>
       <p:sp>
         <p:nvSpPr>
-          <p:cNvPr id="10" name="Rectangle 9"/>
+          <p:cNvPr id="11" name="Rectangle 10"/>
           <p:cNvSpPr/>
           <p:nvPr/>
         </p:nvSpPr>
@@ -4699,7 +4751,7 @@
       </p:sp>
       <p:sp>
         <p:nvSpPr>
-          <p:cNvPr id="11" name="Rectangle 10"/>
+          <p:cNvPr id="12" name="Rectangle 11"/>
           <p:cNvSpPr/>
           <p:nvPr/>
         </p:nvSpPr>
@@ -4740,7 +4792,7 @@
       </p:sp>
       <p:sp>
         <p:nvSpPr>
-          <p:cNvPr id="12" name="TextBox 11"/>
+          <p:cNvPr id="13" name="TextBox 12"/>
           <p:cNvSpPr txBox="1"/>
           <p:nvPr/>
         </p:nvSpPr>
@@ -4782,7 +4834,7 @@
       </p:sp>
       <p:sp>
         <p:nvSpPr>
-          <p:cNvPr id="13" name="TextBox 12"/>
+          <p:cNvPr id="14" name="TextBox 13"/>
           <p:cNvSpPr txBox="1"/>
           <p:nvPr/>
         </p:nvSpPr>
@@ -4824,7 +4876,7 @@
       </p:sp>
       <p:sp>
         <p:nvSpPr>
-          <p:cNvPr id="14" name="TextBox 13"/>
+          <p:cNvPr id="15" name="TextBox 14"/>
           <p:cNvSpPr txBox="1"/>
           <p:nvPr/>
         </p:nvSpPr>
@@ -4923,7 +4975,7 @@
       </p:sp>
       <p:sp>
         <p:nvSpPr>
-          <p:cNvPr id="15" name="Rectangle 14"/>
+          <p:cNvPr id="16" name="Rectangle 15"/>
           <p:cNvSpPr/>
           <p:nvPr/>
         </p:nvSpPr>
@@ -4964,7 +5016,7 @@
       </p:sp>
       <p:sp>
         <p:nvSpPr>
-          <p:cNvPr id="16" name="Rectangle 15"/>
+          <p:cNvPr id="17" name="Rectangle 16"/>
           <p:cNvSpPr/>
           <p:nvPr/>
         </p:nvSpPr>
@@ -5005,7 +5057,7 @@
       </p:sp>
       <p:sp>
         <p:nvSpPr>
-          <p:cNvPr id="17" name="Rectangle 16"/>
+          <p:cNvPr id="18" name="Rectangle 17"/>
           <p:cNvSpPr/>
           <p:nvPr/>
         </p:nvSpPr>
@@ -5046,7 +5098,7 @@
       </p:sp>
       <p:sp>
         <p:nvSpPr>
-          <p:cNvPr id="18" name="TextBox 17"/>
+          <p:cNvPr id="19" name="TextBox 18"/>
           <p:cNvSpPr txBox="1"/>
           <p:nvPr/>
         </p:nvSpPr>
@@ -5088,7 +5140,7 @@
       </p:sp>
       <p:sp>
         <p:nvSpPr>
-          <p:cNvPr id="19" name="TextBox 18"/>
+          <p:cNvPr id="20" name="TextBox 19"/>
           <p:cNvSpPr txBox="1"/>
           <p:nvPr/>
         </p:nvSpPr>
@@ -5130,7 +5182,7 @@
       </p:sp>
       <p:sp>
         <p:nvSpPr>
-          <p:cNvPr id="20" name="TextBox 19"/>
+          <p:cNvPr id="21" name="TextBox 20"/>
           <p:cNvSpPr txBox="1"/>
           <p:nvPr/>
         </p:nvSpPr>
@@ -5229,7 +5281,7 @@
       </p:sp>
       <p:sp>
         <p:nvSpPr>
-          <p:cNvPr id="21" name="Rectangle 20"/>
+          <p:cNvPr id="22" name="Rectangle 21"/>
           <p:cNvSpPr/>
           <p:nvPr/>
         </p:nvSpPr>
@@ -5270,7 +5322,7 @@
       </p:sp>
       <p:sp>
         <p:nvSpPr>
-          <p:cNvPr id="22" name="Rectangle 21"/>
+          <p:cNvPr id="23" name="Rectangle 22"/>
           <p:cNvSpPr/>
           <p:nvPr/>
         </p:nvSpPr>
@@ -5311,7 +5363,7 @@
       </p:sp>
       <p:sp>
         <p:nvSpPr>
-          <p:cNvPr id="23" name="Rectangle 22"/>
+          <p:cNvPr id="24" name="Rectangle 23"/>
           <p:cNvSpPr/>
           <p:nvPr/>
         </p:nvSpPr>
@@ -5352,7 +5404,7 @@
       </p:sp>
       <p:sp>
         <p:nvSpPr>
-          <p:cNvPr id="24" name="TextBox 23"/>
+          <p:cNvPr id="25" name="TextBox 24"/>
           <p:cNvSpPr txBox="1"/>
           <p:nvPr/>
         </p:nvSpPr>
@@ -5394,7 +5446,7 @@
       </p:sp>
       <p:sp>
         <p:nvSpPr>
-          <p:cNvPr id="25" name="TextBox 24"/>
+          <p:cNvPr id="26" name="TextBox 25"/>
           <p:cNvSpPr txBox="1"/>
           <p:nvPr/>
         </p:nvSpPr>
@@ -5436,7 +5488,7 @@
       </p:sp>
       <p:sp>
         <p:nvSpPr>
-          <p:cNvPr id="26" name="TextBox 25"/>
+          <p:cNvPr id="27" name="TextBox 26"/>
           <p:cNvSpPr txBox="1"/>
           <p:nvPr/>
         </p:nvSpPr>
@@ -5535,7 +5587,7 @@
       </p:sp>
       <p:sp>
         <p:nvSpPr>
-          <p:cNvPr id="27" name="Rectangle 26"/>
+          <p:cNvPr id="28" name="Rectangle 27"/>
           <p:cNvSpPr/>
           <p:nvPr/>
         </p:nvSpPr>
@@ -5578,7 +5630,7 @@
       </p:sp>
       <p:sp>
         <p:nvSpPr>
-          <p:cNvPr id="28" name="Rectangle 27"/>
+          <p:cNvPr id="29" name="Rectangle 28"/>
           <p:cNvSpPr/>
           <p:nvPr/>
         </p:nvSpPr>
@@ -5619,7 +5671,7 @@
       </p:sp>
       <p:sp>
         <p:nvSpPr>
-          <p:cNvPr id="29" name="TextBox 28"/>
+          <p:cNvPr id="30" name="TextBox 29"/>
           <p:cNvSpPr txBox="1"/>
           <p:nvPr/>
         </p:nvSpPr>
@@ -5661,7 +5713,7 @@
       </p:sp>
       <p:sp>
         <p:nvSpPr>
-          <p:cNvPr id="30" name="TextBox 29"/>
+          <p:cNvPr id="31" name="TextBox 30"/>
           <p:cNvSpPr txBox="1"/>
           <p:nvPr/>
         </p:nvSpPr>
@@ -5760,7 +5812,7 @@
       </p:sp>
       <p:sp>
         <p:nvSpPr>
-          <p:cNvPr id="31" name="Rectangle 30"/>
+          <p:cNvPr id="32" name="Rectangle 31"/>
           <p:cNvSpPr/>
           <p:nvPr/>
         </p:nvSpPr>
@@ -5803,7 +5855,7 @@
       </p:sp>
       <p:sp>
         <p:nvSpPr>
-          <p:cNvPr id="32" name="Rectangle 31"/>
+          <p:cNvPr id="33" name="Rectangle 32"/>
           <p:cNvSpPr/>
           <p:nvPr/>
         </p:nvSpPr>
@@ -5844,7 +5896,7 @@
       </p:sp>
       <p:sp>
         <p:nvSpPr>
-          <p:cNvPr id="33" name="TextBox 32"/>
+          <p:cNvPr id="34" name="TextBox 33"/>
           <p:cNvSpPr txBox="1"/>
           <p:nvPr/>
         </p:nvSpPr>
@@ -5962,7 +6014,7 @@
       </p:sp>
       <p:sp>
         <p:nvSpPr>
-          <p:cNvPr id="34" name="TextBox 33"/>
+          <p:cNvPr id="35" name="TextBox 34"/>
           <p:cNvSpPr txBox="1"/>
           <p:nvPr/>
         </p:nvSpPr>

--- a/assets/memos/A6-memo.pptx
+++ b/assets/memos/A6-memo.pptx
@@ -3084,9 +3084,12 @@
   <p:cSld>
     <p:bg>
       <p:bgPr>
-        <a:solidFill>
-          <a:srgbClr val="FFFFFF"/>
-        </a:solidFill>
+        <a:blipFill>
+          <a:blip r:embed="rId2"/>
+          <a:stretch>
+            <a:fillRect/>
+          </a:stretch>
+        </a:blipFill>
         <a:effectLst/>
       </p:bgPr>
     </p:bg>
@@ -3097,35 +3100,9 @@
         <p:nvPr/>
       </p:nvGrpSpPr>
       <p:grpSpPr/>
-      <p:pic>
-        <p:nvPicPr>
-          <p:cNvPr id="2" name="Picture 1" descr="bg-p1.png"/>
-          <p:cNvPicPr>
-            <a:picLocks noChangeAspect="1"/>
-          </p:cNvPicPr>
-          <p:nvPr/>
-        </p:nvPicPr>
-        <p:blipFill>
-          <a:blip r:embed="rId2">
-            <a:alphaModFix amt="80000"/>
-          </a:blip>
-          <a:stretch>
-            <a:fillRect/>
-          </a:stretch>
-        </p:blipFill>
-        <p:spPr>
-          <a:xfrm>
-            <a:off x="0" y="0"/>
-            <a:ext cx="7556399" cy="10692000"/>
-          </a:xfrm>
-          <a:prstGeom prst="rect">
-            <a:avLst/>
-          </a:prstGeom>
-        </p:spPr>
-      </p:pic>
-      <p:sp>
-        <p:nvSpPr>
-          <p:cNvPr id="3" name="TextBox 2"/>
+      <p:sp>
+        <p:nvSpPr>
+          <p:cNvPr id="2" name="TextBox 1"/>
           <p:cNvSpPr txBox="1"/>
           <p:nvPr/>
         </p:nvSpPr>
@@ -3186,7 +3163,7 @@
       </p:sp>
       <p:sp>
         <p:nvSpPr>
-          <p:cNvPr id="4" name="Rectangle 3"/>
+          <p:cNvPr id="3" name="Rectangle 2"/>
           <p:cNvSpPr/>
           <p:nvPr/>
         </p:nvSpPr>
@@ -3227,7 +3204,7 @@
       </p:sp>
       <p:sp>
         <p:nvSpPr>
-          <p:cNvPr id="5" name="Rectangle 4"/>
+          <p:cNvPr id="4" name="Rectangle 3"/>
           <p:cNvSpPr/>
           <p:nvPr/>
         </p:nvSpPr>
@@ -3268,7 +3245,7 @@
       </p:sp>
       <p:sp>
         <p:nvSpPr>
-          <p:cNvPr id="6" name="Rectangle 5"/>
+          <p:cNvPr id="5" name="Rectangle 4"/>
           <p:cNvSpPr/>
           <p:nvPr/>
         </p:nvSpPr>
@@ -3309,7 +3286,7 @@
       </p:sp>
       <p:sp>
         <p:nvSpPr>
-          <p:cNvPr id="7" name="TextBox 6"/>
+          <p:cNvPr id="6" name="TextBox 5"/>
           <p:cNvSpPr txBox="1"/>
           <p:nvPr/>
         </p:nvSpPr>
@@ -3351,7 +3328,7 @@
       </p:sp>
       <p:sp>
         <p:nvSpPr>
-          <p:cNvPr id="8" name="TextBox 7"/>
+          <p:cNvPr id="7" name="TextBox 6"/>
           <p:cNvSpPr txBox="1"/>
           <p:nvPr/>
         </p:nvSpPr>
@@ -3393,7 +3370,7 @@
       </p:sp>
       <p:sp>
         <p:nvSpPr>
-          <p:cNvPr id="9" name="TextBox 8"/>
+          <p:cNvPr id="8" name="TextBox 7"/>
           <p:cNvSpPr txBox="1"/>
           <p:nvPr/>
         </p:nvSpPr>
@@ -3492,7 +3469,7 @@
       </p:sp>
       <p:sp>
         <p:nvSpPr>
-          <p:cNvPr id="10" name="Rectangle 9"/>
+          <p:cNvPr id="9" name="Rectangle 8"/>
           <p:cNvSpPr/>
           <p:nvPr/>
         </p:nvSpPr>
@@ -3533,7 +3510,7 @@
       </p:sp>
       <p:sp>
         <p:nvSpPr>
-          <p:cNvPr id="11" name="Rectangle 10"/>
+          <p:cNvPr id="10" name="Rectangle 9"/>
           <p:cNvSpPr/>
           <p:nvPr/>
         </p:nvSpPr>
@@ -3574,7 +3551,7 @@
       </p:sp>
       <p:sp>
         <p:nvSpPr>
-          <p:cNvPr id="12" name="Rectangle 11"/>
+          <p:cNvPr id="11" name="Rectangle 10"/>
           <p:cNvSpPr/>
           <p:nvPr/>
         </p:nvSpPr>
@@ -3615,7 +3592,7 @@
       </p:sp>
       <p:sp>
         <p:nvSpPr>
-          <p:cNvPr id="13" name="TextBox 12"/>
+          <p:cNvPr id="12" name="TextBox 11"/>
           <p:cNvSpPr txBox="1"/>
           <p:nvPr/>
         </p:nvSpPr>
@@ -3657,7 +3634,7 @@
       </p:sp>
       <p:sp>
         <p:nvSpPr>
-          <p:cNvPr id="14" name="TextBox 13"/>
+          <p:cNvPr id="13" name="TextBox 12"/>
           <p:cNvSpPr txBox="1"/>
           <p:nvPr/>
         </p:nvSpPr>
@@ -3699,7 +3676,7 @@
       </p:sp>
       <p:sp>
         <p:nvSpPr>
-          <p:cNvPr id="15" name="TextBox 14"/>
+          <p:cNvPr id="14" name="TextBox 13"/>
           <p:cNvSpPr txBox="1"/>
           <p:nvPr/>
         </p:nvSpPr>
@@ -3798,7 +3775,7 @@
       </p:sp>
       <p:sp>
         <p:nvSpPr>
-          <p:cNvPr id="16" name="Rectangle 15"/>
+          <p:cNvPr id="15" name="Rectangle 14"/>
           <p:cNvSpPr/>
           <p:nvPr/>
         </p:nvSpPr>
@@ -3839,7 +3816,7 @@
       </p:sp>
       <p:sp>
         <p:nvSpPr>
-          <p:cNvPr id="17" name="Rectangle 16"/>
+          <p:cNvPr id="16" name="Rectangle 15"/>
           <p:cNvSpPr/>
           <p:nvPr/>
         </p:nvSpPr>
@@ -3880,7 +3857,7 @@
       </p:sp>
       <p:sp>
         <p:nvSpPr>
-          <p:cNvPr id="18" name="Rectangle 17"/>
+          <p:cNvPr id="17" name="Rectangle 16"/>
           <p:cNvSpPr/>
           <p:nvPr/>
         </p:nvSpPr>
@@ -3921,7 +3898,7 @@
       </p:sp>
       <p:sp>
         <p:nvSpPr>
-          <p:cNvPr id="19" name="TextBox 18"/>
+          <p:cNvPr id="18" name="TextBox 17"/>
           <p:cNvSpPr txBox="1"/>
           <p:nvPr/>
         </p:nvSpPr>
@@ -3963,7 +3940,7 @@
       </p:sp>
       <p:sp>
         <p:nvSpPr>
-          <p:cNvPr id="20" name="TextBox 19"/>
+          <p:cNvPr id="19" name="TextBox 18"/>
           <p:cNvSpPr txBox="1"/>
           <p:nvPr/>
         </p:nvSpPr>
@@ -4005,7 +3982,7 @@
       </p:sp>
       <p:sp>
         <p:nvSpPr>
-          <p:cNvPr id="21" name="TextBox 20"/>
+          <p:cNvPr id="20" name="TextBox 19"/>
           <p:cNvSpPr txBox="1"/>
           <p:nvPr/>
         </p:nvSpPr>
@@ -4104,7 +4081,7 @@
       </p:sp>
       <p:sp>
         <p:nvSpPr>
-          <p:cNvPr id="22" name="Rectangle 21"/>
+          <p:cNvPr id="21" name="Rectangle 20"/>
           <p:cNvSpPr/>
           <p:nvPr/>
         </p:nvSpPr>
@@ -4147,7 +4124,7 @@
       </p:sp>
       <p:sp>
         <p:nvSpPr>
-          <p:cNvPr id="23" name="TextBox 22"/>
+          <p:cNvPr id="22" name="TextBox 21"/>
           <p:cNvSpPr txBox="1"/>
           <p:nvPr/>
         </p:nvSpPr>
@@ -4208,7 +4185,7 @@
       </p:sp>
       <p:sp>
         <p:nvSpPr>
-          <p:cNvPr id="24" name="TextBox 23"/>
+          <p:cNvPr id="23" name="TextBox 22"/>
           <p:cNvSpPr txBox="1"/>
           <p:nvPr/>
         </p:nvSpPr>
@@ -4261,9 +4238,12 @@
   <p:cSld>
     <p:bg>
       <p:bgPr>
-        <a:solidFill>
-          <a:srgbClr val="FFFFFF"/>
-        </a:solidFill>
+        <a:blipFill>
+          <a:blip r:embed="rId2"/>
+          <a:stretch>
+            <a:fillRect/>
+          </a:stretch>
+        </a:blipFill>
         <a:effectLst/>
       </p:bgPr>
     </p:bg>
@@ -4274,35 +4254,9 @@
         <p:nvPr/>
       </p:nvGrpSpPr>
       <p:grpSpPr/>
-      <p:pic>
-        <p:nvPicPr>
-          <p:cNvPr id="2" name="Picture 1" descr="bg-p2.png"/>
-          <p:cNvPicPr>
-            <a:picLocks noChangeAspect="1"/>
-          </p:cNvPicPr>
-          <p:nvPr/>
-        </p:nvPicPr>
-        <p:blipFill>
-          <a:blip r:embed="rId2">
-            <a:alphaModFix amt="80000"/>
-          </a:blip>
-          <a:stretch>
-            <a:fillRect/>
-          </a:stretch>
-        </p:blipFill>
-        <p:spPr>
-          <a:xfrm>
-            <a:off x="0" y="0"/>
-            <a:ext cx="7556399" cy="10692000"/>
-          </a:xfrm>
-          <a:prstGeom prst="rect">
-            <a:avLst/>
-          </a:prstGeom>
-        </p:spPr>
-      </p:pic>
-      <p:sp>
-        <p:nvSpPr>
-          <p:cNvPr id="3" name="TextBox 2"/>
+      <p:sp>
+        <p:nvSpPr>
+          <p:cNvPr id="2" name="TextBox 1"/>
           <p:cNvSpPr txBox="1"/>
           <p:nvPr/>
         </p:nvSpPr>
@@ -4363,7 +4317,7 @@
       </p:sp>
       <p:sp>
         <p:nvSpPr>
-          <p:cNvPr id="4" name="Rectangle 3"/>
+          <p:cNvPr id="3" name="Rectangle 2"/>
           <p:cNvSpPr/>
           <p:nvPr/>
         </p:nvSpPr>
@@ -4404,7 +4358,7 @@
       </p:sp>
       <p:sp>
         <p:nvSpPr>
-          <p:cNvPr id="5" name="Rectangle 4"/>
+          <p:cNvPr id="4" name="Rectangle 3"/>
           <p:cNvSpPr/>
           <p:nvPr/>
         </p:nvSpPr>
@@ -4445,7 +4399,7 @@
       </p:sp>
       <p:sp>
         <p:nvSpPr>
-          <p:cNvPr id="6" name="Rectangle 5"/>
+          <p:cNvPr id="5" name="Rectangle 4"/>
           <p:cNvSpPr/>
           <p:nvPr/>
         </p:nvSpPr>
@@ -4486,7 +4440,7 @@
       </p:sp>
       <p:sp>
         <p:nvSpPr>
-          <p:cNvPr id="7" name="TextBox 6"/>
+          <p:cNvPr id="6" name="TextBox 5"/>
           <p:cNvSpPr txBox="1"/>
           <p:nvPr/>
         </p:nvSpPr>
@@ -4528,7 +4482,7 @@
       </p:sp>
       <p:sp>
         <p:nvSpPr>
-          <p:cNvPr id="8" name="TextBox 7"/>
+          <p:cNvPr id="7" name="TextBox 6"/>
           <p:cNvSpPr txBox="1"/>
           <p:nvPr/>
         </p:nvSpPr>
@@ -4570,7 +4524,7 @@
       </p:sp>
       <p:sp>
         <p:nvSpPr>
-          <p:cNvPr id="9" name="TextBox 8"/>
+          <p:cNvPr id="8" name="TextBox 7"/>
           <p:cNvSpPr txBox="1"/>
           <p:nvPr/>
         </p:nvSpPr>
@@ -4669,7 +4623,7 @@
       </p:sp>
       <p:sp>
         <p:nvSpPr>
-          <p:cNvPr id="10" name="Rectangle 9"/>
+          <p:cNvPr id="9" name="Rectangle 8"/>
           <p:cNvSpPr/>
           <p:nvPr/>
         </p:nvSpPr>
@@ -4710,7 +4664,7 @@
       </p:sp>
       <p:sp>
         <p:nvSpPr>
-          <p:cNvPr id="11" name="Rectangle 10"/>
+          <p:cNvPr id="10" name="Rectangle 9"/>
           <p:cNvSpPr/>
           <p:nvPr/>
         </p:nvSpPr>
@@ -4751,7 +4705,7 @@
       </p:sp>
       <p:sp>
         <p:nvSpPr>
-          <p:cNvPr id="12" name="Rectangle 11"/>
+          <p:cNvPr id="11" name="Rectangle 10"/>
           <p:cNvSpPr/>
           <p:nvPr/>
         </p:nvSpPr>
@@ -4792,7 +4746,7 @@
       </p:sp>
       <p:sp>
         <p:nvSpPr>
-          <p:cNvPr id="13" name="TextBox 12"/>
+          <p:cNvPr id="12" name="TextBox 11"/>
           <p:cNvSpPr txBox="1"/>
           <p:nvPr/>
         </p:nvSpPr>
@@ -4834,7 +4788,7 @@
       </p:sp>
       <p:sp>
         <p:nvSpPr>
-          <p:cNvPr id="14" name="TextBox 13"/>
+          <p:cNvPr id="13" name="TextBox 12"/>
           <p:cNvSpPr txBox="1"/>
           <p:nvPr/>
         </p:nvSpPr>
@@ -4876,7 +4830,7 @@
       </p:sp>
       <p:sp>
         <p:nvSpPr>
-          <p:cNvPr id="15" name="TextBox 14"/>
+          <p:cNvPr id="14" name="TextBox 13"/>
           <p:cNvSpPr txBox="1"/>
           <p:nvPr/>
         </p:nvSpPr>
@@ -4975,7 +4929,7 @@
       </p:sp>
       <p:sp>
         <p:nvSpPr>
-          <p:cNvPr id="16" name="Rectangle 15"/>
+          <p:cNvPr id="15" name="Rectangle 14"/>
           <p:cNvSpPr/>
           <p:nvPr/>
         </p:nvSpPr>
@@ -5016,7 +4970,7 @@
       </p:sp>
       <p:sp>
         <p:nvSpPr>
-          <p:cNvPr id="17" name="Rectangle 16"/>
+          <p:cNvPr id="16" name="Rectangle 15"/>
           <p:cNvSpPr/>
           <p:nvPr/>
         </p:nvSpPr>
@@ -5057,7 +5011,7 @@
       </p:sp>
       <p:sp>
         <p:nvSpPr>
-          <p:cNvPr id="18" name="Rectangle 17"/>
+          <p:cNvPr id="17" name="Rectangle 16"/>
           <p:cNvSpPr/>
           <p:nvPr/>
         </p:nvSpPr>
@@ -5098,7 +5052,7 @@
       </p:sp>
       <p:sp>
         <p:nvSpPr>
-          <p:cNvPr id="19" name="TextBox 18"/>
+          <p:cNvPr id="18" name="TextBox 17"/>
           <p:cNvSpPr txBox="1"/>
           <p:nvPr/>
         </p:nvSpPr>
@@ -5140,7 +5094,7 @@
       </p:sp>
       <p:sp>
         <p:nvSpPr>
-          <p:cNvPr id="20" name="TextBox 19"/>
+          <p:cNvPr id="19" name="TextBox 18"/>
           <p:cNvSpPr txBox="1"/>
           <p:nvPr/>
         </p:nvSpPr>
@@ -5182,7 +5136,7 @@
       </p:sp>
       <p:sp>
         <p:nvSpPr>
-          <p:cNvPr id="21" name="TextBox 20"/>
+          <p:cNvPr id="20" name="TextBox 19"/>
           <p:cNvSpPr txBox="1"/>
           <p:nvPr/>
         </p:nvSpPr>
@@ -5281,7 +5235,7 @@
       </p:sp>
       <p:sp>
         <p:nvSpPr>
-          <p:cNvPr id="22" name="Rectangle 21"/>
+          <p:cNvPr id="21" name="Rectangle 20"/>
           <p:cNvSpPr/>
           <p:nvPr/>
         </p:nvSpPr>
@@ -5322,7 +5276,7 @@
       </p:sp>
       <p:sp>
         <p:nvSpPr>
-          <p:cNvPr id="23" name="Rectangle 22"/>
+          <p:cNvPr id="22" name="Rectangle 21"/>
           <p:cNvSpPr/>
           <p:nvPr/>
         </p:nvSpPr>
@@ -5363,7 +5317,7 @@
       </p:sp>
       <p:sp>
         <p:nvSpPr>
-          <p:cNvPr id="24" name="Rectangle 23"/>
+          <p:cNvPr id="23" name="Rectangle 22"/>
           <p:cNvSpPr/>
           <p:nvPr/>
         </p:nvSpPr>
@@ -5404,7 +5358,7 @@
       </p:sp>
       <p:sp>
         <p:nvSpPr>
-          <p:cNvPr id="25" name="TextBox 24"/>
+          <p:cNvPr id="24" name="TextBox 23"/>
           <p:cNvSpPr txBox="1"/>
           <p:nvPr/>
         </p:nvSpPr>
@@ -5446,7 +5400,7 @@
       </p:sp>
       <p:sp>
         <p:nvSpPr>
-          <p:cNvPr id="26" name="TextBox 25"/>
+          <p:cNvPr id="25" name="TextBox 24"/>
           <p:cNvSpPr txBox="1"/>
           <p:nvPr/>
         </p:nvSpPr>
@@ -5488,7 +5442,7 @@
       </p:sp>
       <p:sp>
         <p:nvSpPr>
-          <p:cNvPr id="27" name="TextBox 26"/>
+          <p:cNvPr id="26" name="TextBox 25"/>
           <p:cNvSpPr txBox="1"/>
           <p:nvPr/>
         </p:nvSpPr>
@@ -5587,7 +5541,7 @@
       </p:sp>
       <p:sp>
         <p:nvSpPr>
-          <p:cNvPr id="28" name="Rectangle 27"/>
+          <p:cNvPr id="27" name="Rectangle 26"/>
           <p:cNvSpPr/>
           <p:nvPr/>
         </p:nvSpPr>
@@ -5630,7 +5584,7 @@
       </p:sp>
       <p:sp>
         <p:nvSpPr>
-          <p:cNvPr id="29" name="Rectangle 28"/>
+          <p:cNvPr id="28" name="Rectangle 27"/>
           <p:cNvSpPr/>
           <p:nvPr/>
         </p:nvSpPr>
@@ -5671,7 +5625,7 @@
       </p:sp>
       <p:sp>
         <p:nvSpPr>
-          <p:cNvPr id="30" name="TextBox 29"/>
+          <p:cNvPr id="29" name="TextBox 28"/>
           <p:cNvSpPr txBox="1"/>
           <p:nvPr/>
         </p:nvSpPr>
@@ -5713,7 +5667,7 @@
       </p:sp>
       <p:sp>
         <p:nvSpPr>
-          <p:cNvPr id="31" name="TextBox 30"/>
+          <p:cNvPr id="30" name="TextBox 29"/>
           <p:cNvSpPr txBox="1"/>
           <p:nvPr/>
         </p:nvSpPr>
@@ -5812,7 +5766,7 @@
       </p:sp>
       <p:sp>
         <p:nvSpPr>
-          <p:cNvPr id="32" name="Rectangle 31"/>
+          <p:cNvPr id="31" name="Rectangle 30"/>
           <p:cNvSpPr/>
           <p:nvPr/>
         </p:nvSpPr>
@@ -5855,7 +5809,7 @@
       </p:sp>
       <p:sp>
         <p:nvSpPr>
-          <p:cNvPr id="33" name="Rectangle 32"/>
+          <p:cNvPr id="32" name="Rectangle 31"/>
           <p:cNvSpPr/>
           <p:nvPr/>
         </p:nvSpPr>
@@ -5896,7 +5850,7 @@
       </p:sp>
       <p:sp>
         <p:nvSpPr>
-          <p:cNvPr id="34" name="TextBox 33"/>
+          <p:cNvPr id="33" name="TextBox 32"/>
           <p:cNvSpPr txBox="1"/>
           <p:nvPr/>
         </p:nvSpPr>
@@ -6014,7 +5968,7 @@
       </p:sp>
       <p:sp>
         <p:nvSpPr>
-          <p:cNvPr id="35" name="TextBox 34"/>
+          <p:cNvPr id="34" name="TextBox 33"/>
           <p:cNvSpPr txBox="1"/>
           <p:nvPr/>
         </p:nvSpPr>
